--- a/docs/reviews/Review3_QueryGenie.pptx
+++ b/docs/reviews/Review3_QueryGenie.pptx
@@ -4971,7 +4971,14 @@
             <a:pPr algn="r"/>
             <a:r>
               <a:rPr lang="en-US" dirty="0"/>
-              <a:t>2320090009 : Bodupally Narendar</a:t>
+              <a:t>2320090009 : Boddupally Narendar</a:t>
+            </a:r>
+          </a:p>
+          <a:p>
+            <a:pPr algn="r"/>
+            <a:r>
+              <a:rPr lang="en-US" dirty="0"/>
+              <a:t>2320090018 : M Praneeth Reddy</a:t>
             </a:r>
           </a:p>
           <a:p>

--- a/docs/reviews/Review3_QueryGenie.pptx
+++ b/docs/reviews/Review3_QueryGenie.pptx
@@ -6271,7 +6271,7 @@
             </a:r>
             <a:r>
               <a:rPr sz="1700" b="0"/>
-              <a:t> src/codes_prompt.py (evaluated pipeline) · engine.py (answer/abstain) · model.py (backends) · app.py (UI) · abstention.py (statistics)</a:t>
+              <a:t> querygenie/ core — pipeline.py (evaluated pipeline) · confidence.py (answer/abstain) · model.py (evaluated backend) · desktop/ (the app) · research/ (harness, statistics) · legacy/ (prototype)</a:t>
             </a:r>
           </a:p>
           <a:p>
@@ -6316,7 +6316,7 @@
             </a:r>
             <a:r>
               <a:rPr sz="1700" b="0"/>
-              <a:t> 9 model-free tests of selection, agreement, abstention and modes — pytest, &lt; 1 s</a:t>
+              <a:t> 15 model-free tests of selection, agreement, abstention, modes, databases and chats — pytest, &lt; 1 s</a:t>
             </a:r>
           </a:p>
           <a:p>

--- a/docs/reviews/Review3_QueryGenie.pptx
+++ b/docs/reviews/Review3_QueryGenie.pptx
@@ -6316,7 +6316,7 @@
             </a:r>
             <a:r>
               <a:rPr sz="1700" b="0"/>
-              <a:t> 15 model-free tests of selection, agreement, abstention, modes, databases and chats — pytest, &lt; 1 s</a:t>
+              <a:t> 23 model-free tests of selection, agreement, abstention, modes, databases, chats and model providers — pytest, about 2 s</a:t>
             </a:r>
           </a:p>
           <a:p>
@@ -6346,7 +6346,7 @@
             </a:r>
             <a:r>
               <a:rPr sz="1700" b="0"/>
-              <a:t> local weights, query timeouts, no data sent to third parties</a:t>
+              <a:t> local weights by default, read-only queries with timeouts; optional cloud models are labelled and never see result rows</a:t>
             </a:r>
           </a:p>
         </p:txBody>
